--- a/examples/relations/usage/relations.pptx
+++ b/examples/relations/usage/relations.pptx
@@ -6347,7 +6347,7 @@
           </a:p>
           <a:p>
             <a:r>
-              <a:t>  "template_sha256": "fc24f690dc587816976bb82874f322b97d4687e0a2795d71812135075497889d"</a:t>
+              <a:t>  "template_sha256": "e12dc8756e33b4cce0edabc6f41b7ba67f78b82ece8a9098f972923d5185cf74"</a:t>
             </a:r>
           </a:p>
           <a:p>
@@ -18946,7 +18946,7 @@
         <p:spPr>
           <a:xfrm>
             <a:off x="1490471" y="2971800"/>
-            <a:ext cx="2944369" cy="283464"/>
+            <a:ext cx="2944369" cy="237744"/>
           </a:xfrm>
           <a:prstGeom prst="rect">
             <a:avLst/>
@@ -19002,7 +19002,7 @@
         </p:nvCxnSpPr>
         <p:spPr>
           <a:xfrm>
-            <a:off x="1399031" y="3268980"/>
+            <a:off x="1399031" y="3223260"/>
             <a:ext cx="3127249" cy="0"/>
           </a:xfrm>
           <a:prstGeom prst="line">
@@ -19039,8 +19039,8 @@
         </p:nvSpPr>
         <p:spPr>
           <a:xfrm>
-            <a:off x="4617720" y="3335274"/>
-            <a:ext cx="2944368" cy="283464"/>
+            <a:off x="4617720" y="3328416"/>
+            <a:ext cx="2944368" cy="237744"/>
           </a:xfrm>
           <a:prstGeom prst="rect">
             <a:avLst/>
@@ -19096,7 +19096,7 @@
         </p:nvCxnSpPr>
         <p:spPr>
           <a:xfrm>
-            <a:off x="4526280" y="3632454"/>
+            <a:off x="4526280" y="3579876"/>
             <a:ext cx="3127248" cy="0"/>
           </a:xfrm>
           <a:prstGeom prst="line">
@@ -19133,8 +19133,8 @@
         </p:nvSpPr>
         <p:spPr>
           <a:xfrm>
-            <a:off x="4617720" y="3698748"/>
-            <a:ext cx="2944368" cy="283464"/>
+            <a:off x="4617720" y="3685032"/>
+            <a:ext cx="2944368" cy="237744"/>
           </a:xfrm>
           <a:prstGeom prst="rect">
             <a:avLst/>
@@ -19190,7 +19190,7 @@
         </p:nvCxnSpPr>
         <p:spPr>
           <a:xfrm flipH="1">
-            <a:off x="4526280" y="3995928"/>
+            <a:off x="4526280" y="3936492"/>
             <a:ext cx="3127248" cy="0"/>
           </a:xfrm>
           <a:prstGeom prst="line">
@@ -19227,8 +19227,8 @@
         </p:nvSpPr>
         <p:spPr>
           <a:xfrm>
-            <a:off x="3703320" y="4062222"/>
-            <a:ext cx="1645920" cy="283464"/>
+            <a:off x="3703320" y="4041648"/>
+            <a:ext cx="1645920" cy="237744"/>
           </a:xfrm>
           <a:prstGeom prst="rect">
             <a:avLst/>
@@ -19284,7 +19284,7 @@
         </p:nvCxnSpPr>
         <p:spPr>
           <a:xfrm>
-            <a:off x="4526280" y="4359402"/>
+            <a:off x="4526280" y="4293108"/>
             <a:ext cx="566928" cy="0"/>
           </a:xfrm>
           <a:prstGeom prst="line">
@@ -19320,8 +19320,8 @@
         </p:nvCxnSpPr>
         <p:spPr>
           <a:xfrm>
-            <a:off x="5093208" y="4359402"/>
-            <a:ext cx="0" cy="82296"/>
+            <a:off x="5093208" y="4293108"/>
+            <a:ext cx="0" cy="54864"/>
           </a:xfrm>
           <a:prstGeom prst="line">
             <a:avLst/>
@@ -19355,8 +19355,8 @@
           <p:nvPr/>
         </p:nvCxnSpPr>
         <p:spPr>
-          <a:xfrm flipV="1" flipH="1">
-            <a:off x="4526280" y="4441698"/>
+          <a:xfrm flipH="1">
+            <a:off x="4526280" y="4347972"/>
             <a:ext cx="566928" cy="0"/>
           </a:xfrm>
           <a:prstGeom prst="line">
@@ -19366,7 +19366,7 @@
             <a:solidFill>
               <a:srgbClr val="087E83"/>
             </a:solidFill>
-            <a:tailEnd type="triangle" w="med" len="med"/>
+            <a:tailEnd type="triangle" w="sm" len="med"/>
           </a:ln>
           <a:effectLst/>
         </p:spPr>
@@ -19393,8 +19393,8 @@
         </p:nvSpPr>
         <p:spPr>
           <a:xfrm>
-            <a:off x="4617720" y="4425696"/>
-            <a:ext cx="6071616" cy="283464"/>
+            <a:off x="4617720" y="4398264"/>
+            <a:ext cx="6071616" cy="237744"/>
           </a:xfrm>
           <a:prstGeom prst="rect">
             <a:avLst/>
@@ -19450,7 +19450,7 @@
         </p:nvCxnSpPr>
         <p:spPr>
           <a:xfrm>
-            <a:off x="4526280" y="4722876"/>
+            <a:off x="4526280" y="4649724"/>
             <a:ext cx="6254496" cy="0"/>
           </a:xfrm>
           <a:prstGeom prst="line">
@@ -19487,8 +19487,8 @@
         </p:nvSpPr>
         <p:spPr>
           <a:xfrm>
-            <a:off x="4617720" y="4789170"/>
-            <a:ext cx="6071616" cy="283464"/>
+            <a:off x="4617720" y="4754880"/>
+            <a:ext cx="6071616" cy="237744"/>
           </a:xfrm>
           <a:prstGeom prst="rect">
             <a:avLst/>
@@ -19544,7 +19544,7 @@
         </p:nvCxnSpPr>
         <p:spPr>
           <a:xfrm flipH="1">
-            <a:off x="4526280" y="5086350"/>
+            <a:off x="4526280" y="5006340"/>
             <a:ext cx="6254496" cy="0"/>
           </a:xfrm>
           <a:prstGeom prst="line">
@@ -19581,8 +19581,8 @@
         </p:nvSpPr>
         <p:spPr>
           <a:xfrm>
-            <a:off x="1490471" y="5152644"/>
-            <a:ext cx="2944369" cy="283464"/>
+            <a:off x="1490471" y="5111496"/>
+            <a:ext cx="2944369" cy="237744"/>
           </a:xfrm>
           <a:prstGeom prst="rect">
             <a:avLst/>
@@ -19638,7 +19638,7 @@
         </p:nvCxnSpPr>
         <p:spPr>
           <a:xfrm flipH="1">
-            <a:off x="1399031" y="5449824"/>
+            <a:off x="1399031" y="5362956"/>
             <a:ext cx="3127249" cy="0"/>
           </a:xfrm>
           <a:prstGeom prst="line">
@@ -19675,8 +19675,8 @@
         </p:nvSpPr>
         <p:spPr>
           <a:xfrm>
-            <a:off x="576071" y="5516118"/>
-            <a:ext cx="1645920" cy="283464"/>
+            <a:off x="576071" y="5468112"/>
+            <a:ext cx="1645920" cy="237744"/>
           </a:xfrm>
           <a:prstGeom prst="rect">
             <a:avLst/>
@@ -19732,7 +19732,7 @@
         </p:nvCxnSpPr>
         <p:spPr>
           <a:xfrm>
-            <a:off x="1399031" y="5813298"/>
+            <a:off x="1399031" y="5719572"/>
             <a:ext cx="566928" cy="0"/>
           </a:xfrm>
           <a:prstGeom prst="line">
@@ -19768,8 +19768,8 @@
         </p:nvCxnSpPr>
         <p:spPr>
           <a:xfrm>
-            <a:off x="1965959" y="5813298"/>
-            <a:ext cx="0" cy="82296"/>
+            <a:off x="1965959" y="5719572"/>
+            <a:ext cx="0" cy="54864"/>
           </a:xfrm>
           <a:prstGeom prst="line">
             <a:avLst/>
@@ -19803,8 +19803,8 @@
           <p:nvPr/>
         </p:nvCxnSpPr>
         <p:spPr>
-          <a:xfrm flipV="1" flipH="1">
-            <a:off x="1399031" y="5895594"/>
+          <a:xfrm flipH="1">
+            <a:off x="1399031" y="5774436"/>
             <a:ext cx="566928" cy="0"/>
           </a:xfrm>
           <a:prstGeom prst="line">
@@ -19814,7 +19814,7 @@
             <a:solidFill>
               <a:srgbClr val="087E83"/>
             </a:solidFill>
-            <a:tailEnd type="triangle" w="med" len="med"/>
+            <a:tailEnd type="triangle" w="sm" len="med"/>
           </a:ln>
           <a:effectLst/>
         </p:spPr>
